--- a/lectures/Lecture_16/slides/Lecture_16_Multimodal_Learning_and_Production_ML_Systems.pptx
+++ b/lectures/Lecture_16/slides/Lecture_16_Multimodal_Learning_and_Production_ML_Systems.pptx
@@ -8269,8 +8269,8 @@
         </p:nvSpPr>
         <p:spPr>
           <a:xfrm>
-            <a:off x="658368" y="1883664"/>
-            <a:ext cx="146304" cy="146304"/>
+            <a:off x="658368" y="1837944"/>
+            <a:ext cx="128016" cy="128016"/>
           </a:xfrm>
           <a:prstGeom prst="rect">
             <a:avLst/>
@@ -8313,8 +8313,8 @@
         </p:nvSpPr>
         <p:spPr>
           <a:xfrm>
-            <a:off x="1042416" y="1700784"/>
-            <a:ext cx="10490911" cy="640080"/>
+            <a:off x="1024128" y="1691640"/>
+            <a:ext cx="10509199" cy="621792"/>
           </a:xfrm>
           <a:prstGeom prst="rect">
             <a:avLst/>
@@ -8355,8 +8355,8 @@
         </p:nvSpPr>
         <p:spPr>
           <a:xfrm>
-            <a:off x="658368" y="2596896"/>
-            <a:ext cx="146304" cy="146304"/>
+            <a:off x="658368" y="2514600"/>
+            <a:ext cx="128016" cy="128016"/>
           </a:xfrm>
           <a:prstGeom prst="rect">
             <a:avLst/>
@@ -8399,8 +8399,8 @@
         </p:nvSpPr>
         <p:spPr>
           <a:xfrm>
-            <a:off x="1042416" y="2414016"/>
-            <a:ext cx="10490911" cy="640080"/>
+            <a:off x="1024128" y="2368296"/>
+            <a:ext cx="10509199" cy="621792"/>
           </a:xfrm>
           <a:prstGeom prst="rect">
             <a:avLst/>
@@ -8441,8 +8441,8 @@
         </p:nvSpPr>
         <p:spPr>
           <a:xfrm>
-            <a:off x="658368" y="3310128"/>
-            <a:ext cx="146304" cy="146304"/>
+            <a:off x="658368" y="3191256"/>
+            <a:ext cx="128016" cy="128016"/>
           </a:xfrm>
           <a:prstGeom prst="rect">
             <a:avLst/>
@@ -8485,8 +8485,8 @@
         </p:nvSpPr>
         <p:spPr>
           <a:xfrm>
-            <a:off x="1042416" y="3127248"/>
-            <a:ext cx="10490911" cy="640080"/>
+            <a:off x="1024128" y="3044952"/>
+            <a:ext cx="10509199" cy="621792"/>
           </a:xfrm>
           <a:prstGeom prst="rect">
             <a:avLst/>
@@ -8527,8 +8527,8 @@
         </p:nvSpPr>
         <p:spPr>
           <a:xfrm>
-            <a:off x="658368" y="4023360"/>
-            <a:ext cx="146304" cy="146304"/>
+            <a:off x="658368" y="3867912"/>
+            <a:ext cx="128016" cy="128016"/>
           </a:xfrm>
           <a:prstGeom prst="rect">
             <a:avLst/>
@@ -8571,8 +8571,8 @@
         </p:nvSpPr>
         <p:spPr>
           <a:xfrm>
-            <a:off x="1042416" y="3840480"/>
-            <a:ext cx="10490911" cy="640080"/>
+            <a:off x="1024128" y="3721608"/>
+            <a:ext cx="10509199" cy="621792"/>
           </a:xfrm>
           <a:prstGeom prst="rect">
             <a:avLst/>
@@ -8613,8 +8613,8 @@
         </p:nvSpPr>
         <p:spPr>
           <a:xfrm>
-            <a:off x="658368" y="4736592"/>
-            <a:ext cx="146304" cy="146304"/>
+            <a:off x="658368" y="4544568"/>
+            <a:ext cx="128016" cy="128016"/>
           </a:xfrm>
           <a:prstGeom prst="rect">
             <a:avLst/>
@@ -8657,8 +8657,8 @@
         </p:nvSpPr>
         <p:spPr>
           <a:xfrm>
-            <a:off x="1042416" y="4553712"/>
-            <a:ext cx="10490911" cy="640080"/>
+            <a:off x="1024128" y="4398264"/>
+            <a:ext cx="10509199" cy="621792"/>
           </a:xfrm>
           <a:prstGeom prst="rect">
             <a:avLst/>
@@ -8699,8 +8699,8 @@
         </p:nvSpPr>
         <p:spPr>
           <a:xfrm>
-            <a:off x="658368" y="5449824"/>
-            <a:ext cx="146304" cy="146304"/>
+            <a:off x="658368" y="5221224"/>
+            <a:ext cx="128016" cy="128016"/>
           </a:xfrm>
           <a:prstGeom prst="rect">
             <a:avLst/>
@@ -8743,8 +8743,8 @@
         </p:nvSpPr>
         <p:spPr>
           <a:xfrm>
-            <a:off x="1042416" y="5266944"/>
-            <a:ext cx="10490911" cy="640080"/>
+            <a:off x="1024128" y="5074920"/>
+            <a:ext cx="10509199" cy="621792"/>
           </a:xfrm>
           <a:prstGeom prst="rect">
             <a:avLst/>
@@ -9673,8 +9673,8 @@
         </p:nvSpPr>
         <p:spPr>
           <a:xfrm>
-            <a:off x="658368" y="1764792"/>
-            <a:ext cx="502920" cy="457200"/>
+            <a:off x="658368" y="1728216"/>
+            <a:ext cx="502920" cy="530352"/>
           </a:xfrm>
           <a:prstGeom prst="rect">
             <a:avLst/>
@@ -9715,8 +9715,8 @@
         </p:nvSpPr>
         <p:spPr>
           <a:xfrm>
-            <a:off x="1344168" y="1783080"/>
-            <a:ext cx="10189159" cy="457200"/>
+            <a:off x="1344168" y="1728216"/>
+            <a:ext cx="10189159" cy="530352"/>
           </a:xfrm>
           <a:prstGeom prst="rect">
             <a:avLst/>
@@ -9757,7 +9757,7 @@
         </p:nvSpPr>
         <p:spPr>
           <a:xfrm>
-            <a:off x="658368" y="2267712"/>
+            <a:off x="658368" y="2276856"/>
             <a:ext cx="10874959" cy="9525"/>
           </a:xfrm>
           <a:prstGeom prst="rect">
@@ -9801,8 +9801,8 @@
         </p:nvSpPr>
         <p:spPr>
           <a:xfrm>
-            <a:off x="658368" y="2368296"/>
-            <a:ext cx="502920" cy="457200"/>
+            <a:off x="658368" y="2331720"/>
+            <a:ext cx="502920" cy="530352"/>
           </a:xfrm>
           <a:prstGeom prst="rect">
             <a:avLst/>
@@ -9843,8 +9843,8 @@
         </p:nvSpPr>
         <p:spPr>
           <a:xfrm>
-            <a:off x="1344168" y="2386584"/>
-            <a:ext cx="10189159" cy="457200"/>
+            <a:off x="1344168" y="2331720"/>
+            <a:ext cx="10189159" cy="530352"/>
           </a:xfrm>
           <a:prstGeom prst="rect">
             <a:avLst/>
@@ -9885,7 +9885,7 @@
         </p:nvSpPr>
         <p:spPr>
           <a:xfrm>
-            <a:off x="658368" y="2871216"/>
+            <a:off x="658368" y="2880360"/>
             <a:ext cx="10874959" cy="9525"/>
           </a:xfrm>
           <a:prstGeom prst="rect">
@@ -9929,8 +9929,8 @@
         </p:nvSpPr>
         <p:spPr>
           <a:xfrm>
-            <a:off x="658368" y="2971800"/>
-            <a:ext cx="502920" cy="457200"/>
+            <a:off x="658368" y="2935224"/>
+            <a:ext cx="502920" cy="530352"/>
           </a:xfrm>
           <a:prstGeom prst="rect">
             <a:avLst/>
@@ -9971,8 +9971,8 @@
         </p:nvSpPr>
         <p:spPr>
           <a:xfrm>
-            <a:off x="1344168" y="2990088"/>
-            <a:ext cx="10189159" cy="457200"/>
+            <a:off x="1344168" y="2935224"/>
+            <a:ext cx="10189159" cy="530352"/>
           </a:xfrm>
           <a:prstGeom prst="rect">
             <a:avLst/>
@@ -10013,7 +10013,7 @@
         </p:nvSpPr>
         <p:spPr>
           <a:xfrm>
-            <a:off x="658368" y="3474720"/>
+            <a:off x="658368" y="3483864"/>
             <a:ext cx="10874959" cy="9525"/>
           </a:xfrm>
           <a:prstGeom prst="rect">
@@ -10057,8 +10057,8 @@
         </p:nvSpPr>
         <p:spPr>
           <a:xfrm>
-            <a:off x="658368" y="3575304"/>
-            <a:ext cx="502920" cy="457200"/>
+            <a:off x="658368" y="3538728"/>
+            <a:ext cx="502920" cy="530352"/>
           </a:xfrm>
           <a:prstGeom prst="rect">
             <a:avLst/>
@@ -10099,8 +10099,8 @@
         </p:nvSpPr>
         <p:spPr>
           <a:xfrm>
-            <a:off x="1344168" y="3593592"/>
-            <a:ext cx="10189159" cy="457200"/>
+            <a:off x="1344168" y="3538728"/>
+            <a:ext cx="10189159" cy="530352"/>
           </a:xfrm>
           <a:prstGeom prst="rect">
             <a:avLst/>
@@ -10141,7 +10141,7 @@
         </p:nvSpPr>
         <p:spPr>
           <a:xfrm>
-            <a:off x="658368" y="4078224"/>
+            <a:off x="658368" y="4087368"/>
             <a:ext cx="10874959" cy="9525"/>
           </a:xfrm>
           <a:prstGeom prst="rect">
@@ -10185,8 +10185,8 @@
         </p:nvSpPr>
         <p:spPr>
           <a:xfrm>
-            <a:off x="658368" y="4178808"/>
-            <a:ext cx="502920" cy="457200"/>
+            <a:off x="658368" y="4142232"/>
+            <a:ext cx="502920" cy="530352"/>
           </a:xfrm>
           <a:prstGeom prst="rect">
             <a:avLst/>
@@ -10227,8 +10227,8 @@
         </p:nvSpPr>
         <p:spPr>
           <a:xfrm>
-            <a:off x="1344168" y="4197096"/>
-            <a:ext cx="10189159" cy="457200"/>
+            <a:off x="1344168" y="4142232"/>
+            <a:ext cx="10189159" cy="530352"/>
           </a:xfrm>
           <a:prstGeom prst="rect">
             <a:avLst/>
@@ -10269,7 +10269,7 @@
         </p:nvSpPr>
         <p:spPr>
           <a:xfrm>
-            <a:off x="658368" y="4681728"/>
+            <a:off x="658368" y="4690872"/>
             <a:ext cx="10874959" cy="9525"/>
           </a:xfrm>
           <a:prstGeom prst="rect">
@@ -10313,8 +10313,8 @@
         </p:nvSpPr>
         <p:spPr>
           <a:xfrm>
-            <a:off x="658368" y="4782312"/>
-            <a:ext cx="502920" cy="457200"/>
+            <a:off x="658368" y="4745736"/>
+            <a:ext cx="502920" cy="530352"/>
           </a:xfrm>
           <a:prstGeom prst="rect">
             <a:avLst/>
@@ -10355,8 +10355,8 @@
         </p:nvSpPr>
         <p:spPr>
           <a:xfrm>
-            <a:off x="1344168" y="4800600"/>
-            <a:ext cx="10189159" cy="457200"/>
+            <a:off x="1344168" y="4745736"/>
+            <a:ext cx="10189159" cy="530352"/>
           </a:xfrm>
           <a:prstGeom prst="rect">
             <a:avLst/>
@@ -10397,7 +10397,7 @@
         </p:nvSpPr>
         <p:spPr>
           <a:xfrm>
-            <a:off x="658368" y="5285232"/>
+            <a:off x="658368" y="5294376"/>
             <a:ext cx="10874959" cy="9525"/>
           </a:xfrm>
           <a:prstGeom prst="rect">
@@ -10441,8 +10441,8 @@
         </p:nvSpPr>
         <p:spPr>
           <a:xfrm>
-            <a:off x="658368" y="5495544"/>
-            <a:ext cx="10874959" cy="457200"/>
+            <a:off x="658368" y="5422392"/>
+            <a:ext cx="10874959" cy="411480"/>
           </a:xfrm>
           <a:prstGeom prst="rect">
             <a:avLst/>
@@ -10464,7 +10464,7 @@
               </a:spcAft>
             </a:pPr>
             <a:r>
-              <a:rPr sz="1400" b="0" i="1">
+              <a:rPr sz="1300" b="0" i="1">
                 <a:solidFill>
                   <a:srgbClr val="5A6375"/>
                 </a:solidFill>
